--- a/Liêu Phúc Nguyên - CS2205.JAN2026.DeCuong.FinalReport.AIO.Slide.pptx
+++ b/Liêu Phúc Nguyên - CS2205.JAN2026.DeCuong.FinalReport.AIO.Slide.pptx
@@ -8274,32 +8274,29 @@
               <a:buChar char="●"/>
             </a:pPr>
             <a:r>
-              <a:rPr lang="en"/>
+              <a:rPr lang="en" sz="1800"/>
               <a:t>Lớp: </a:t>
             </a:r>
             <a:r>
-              <a:rPr lang="en-US"/>
+              <a:rPr lang="en-US" sz="1800"/>
               <a:t>CS2205.CH203 </a:t>
             </a:r>
-            <a:endParaRPr lang="en"/>
-          </a:p>
-          <a:p>
-            <a:pPr marL="457200" lvl="0" indent="-368300" algn="l" rtl="0">
-              <a:spcBef>
-                <a:spcPts val="0"/>
-              </a:spcBef>
-              <a:spcAft>
-                <a:spcPts val="0"/>
-              </a:spcAft>
-              <a:buSzPts val="2200"/>
+            <a:endParaRPr lang="en" sz="1800"/>
+          </a:p>
+          <a:p>
+            <a:pPr lvl="0">
               <a:buFont typeface="Arial"/>
               <a:buChar char="●"/>
             </a:pPr>
             <a:r>
-              <a:rPr lang="en"/>
+              <a:rPr lang="en" sz="1800"/>
               <a:t>Link Github của nhóm: </a:t>
             </a:r>
-            <a:endParaRPr/>
+            <a:r>
+              <a:rPr lang="en-US" sz="1800"/>
+              <a:t>https://github.com/NguyenDz1/CS2205.CH203-</a:t>
+            </a:r>
+            <a:endParaRPr sz="1800"/>
           </a:p>
           <a:p>
             <a:pPr marL="457200" lvl="0" indent="-368300" algn="l" rtl="0">
@@ -8313,10 +8310,10 @@
               <a:buChar char="●"/>
             </a:pPr>
             <a:r>
-              <a:rPr lang="en"/>
+              <a:rPr lang="en" sz="1800"/>
               <a:t>Link YouTube video: </a:t>
             </a:r>
-            <a:endParaRPr/>
+            <a:endParaRPr sz="1800"/>
           </a:p>
           <a:p>
             <a:pPr marL="457200" lvl="0" indent="-368300" algn="l" rtl="0">
@@ -8330,10 +8327,10 @@
               <a:buChar char="●"/>
             </a:pPr>
             <a:r>
-              <a:rPr lang="en-US"/>
+              <a:rPr lang="en-US" sz="1800"/>
               <a:t>Họ và tên: Liêu Phúc Nguyên - 250104047</a:t>
             </a:r>
-            <a:endParaRPr/>
+            <a:endParaRPr sz="1800"/>
           </a:p>
           <a:p>
             <a:pPr marL="457200" lvl="0" indent="0" algn="l" rtl="0">
